--- a/slides/release/04-advanced-techniques.pptx
+++ b/slides/release/04-advanced-techniques.pptx
@@ -2506,7 +2506,7 @@
         </p:nvSpPr>
         <p:spPr>
           <a:xfrm>
-            <a:off x="419100" y="5368131"/>
+            <a:off x="495300" y="5672931"/>
             <a:ext cx="7507224" cy="877824"/>
           </a:xfrm>
           <a:prstGeom prst="rect">
@@ -2894,7 +2894,7 @@
         </p:nvSpPr>
         <p:spPr>
           <a:xfrm>
-            <a:off x="704088" y="6130131"/>
+            <a:off x="704088" y="6282531"/>
             <a:ext cx="7507224" cy="1316736"/>
           </a:xfrm>
           <a:prstGeom prst="rect">
@@ -3084,7 +3084,7 @@
         </p:blipFill>
         <p:spPr>
           <a:xfrm>
-            <a:off x="9525" y="3912579"/>
+            <a:off x="0" y="4425696"/>
             <a:ext cx="8915400" cy="537699"/>
           </a:xfrm>
           <a:prstGeom prst="rect">
@@ -3100,7 +3100,7 @@
         </p:nvSpPr>
         <p:spPr>
           <a:xfrm>
-            <a:off x="495300" y="6627481"/>
+            <a:off x="622363" y="6430695"/>
             <a:ext cx="7507224" cy="877824"/>
           </a:xfrm>
           <a:prstGeom prst="rect">
@@ -3310,7 +3310,7 @@
         </p:nvSpPr>
         <p:spPr>
           <a:xfrm>
-            <a:off x="704088" y="5368131"/>
+            <a:off x="571500" y="6130131"/>
             <a:ext cx="7507224" cy="877824"/>
           </a:xfrm>
           <a:prstGeom prst="rect">
@@ -3428,15 +3428,16 @@
             <a:endParaRPr dirty="0"/>
           </a:p>
           <a:p>
+            <a:r>
+              <a:rPr dirty="0"/>
+              <a:t> </a:t>
+            </a:r>
             <a:endParaRPr lang="en-US" dirty="0"/>
           </a:p>
           <a:p>
-            <a:endParaRPr lang="en-US" dirty="0"/>
-          </a:p>
-          <a:p>
             <a:r>
               <a:rPr dirty="0"/>
-              <a:t> Same conversation, four turns. You inspect each handoff.</a:t>
+              <a:t>Same conversation, four turns. You inspect each handoff.</a:t>
             </a:r>
           </a:p>
           <a:p>
@@ -3493,7 +3494,7 @@
         </p:blipFill>
         <p:spPr>
           <a:xfrm>
-            <a:off x="0" y="1353311"/>
+            <a:off x="222250" y="1253331"/>
             <a:ext cx="8915400" cy="1844013"/>
           </a:xfrm>
           <a:prstGeom prst="rect">
@@ -3509,7 +3510,7 @@
         </p:nvSpPr>
         <p:spPr>
           <a:xfrm>
-            <a:off x="571500" y="5100538"/>
+            <a:off x="419100" y="5915493"/>
             <a:ext cx="7507224" cy="877824"/>
           </a:xfrm>
           <a:prstGeom prst="rect">
@@ -3649,7 +3650,7 @@
           </a:p>
           <a:p>
             <a:r>
-              <a:t> Scales from one pasted doc to a saved knowledge base in a Project / Custom GPT / Gem.</a:t>
+              <a:t> Scales from one pasted doc to a saved knowledge base in a Custom GPT / Project / Gem.</a:t>
             </a:r>
           </a:p>
           <a:p>
@@ -3709,7 +3710,7 @@
         </p:blipFill>
         <p:spPr>
           <a:xfrm>
-            <a:off x="241300" y="4606131"/>
+            <a:off x="0" y="4412771"/>
             <a:ext cx="8915400" cy="491775"/>
           </a:xfrm>
           <a:prstGeom prst="rect">
@@ -3725,7 +3726,7 @@
         </p:nvSpPr>
         <p:spPr>
           <a:xfrm>
-            <a:off x="234950" y="6863975"/>
+            <a:off x="495300" y="6392519"/>
             <a:ext cx="7507224" cy="877824"/>
           </a:xfrm>
           <a:prstGeom prst="rect">
@@ -3839,7 +3840,7 @@
               <a:t> system prompt</a:t>
             </a:r>
             <a:r>
-              <a:t> (saved instructions, or a Project/Custom GPT/Gem) sets persistent behavior — no re-explaining every chat.</a:t>
+              <a:t> (saved instructions, or a Custom GPT/Project/Gem) sets persistent behavior — no re-explaining every chat.</a:t>
             </a:r>
           </a:p>
           <a:p>
@@ -3911,7 +3912,7 @@
         </p:nvSpPr>
         <p:spPr>
           <a:xfrm>
-            <a:off x="254000" y="5672931"/>
+            <a:off x="342900" y="5672931"/>
             <a:ext cx="7507224" cy="877824"/>
           </a:xfrm>
           <a:prstGeom prst="rect">
@@ -4086,8 +4087,8 @@
         </p:nvSpPr>
         <p:spPr>
           <a:xfrm>
-            <a:off x="419100" y="4376657"/>
-            <a:ext cx="8001000" cy="1220074"/>
+            <a:off x="495300" y="4987131"/>
+            <a:ext cx="7507224" cy="877824"/>
           </a:xfrm>
           <a:prstGeom prst="rect">
             <a:avLst/>
@@ -4121,7 +4122,7 @@
           <a:p>
             <a:pPr algn="ctr"/>
             <a:r>
-              <a:rPr sz="1800" i="1" dirty="0">
+              <a:rPr sz="1800" i="1">
                 <a:solidFill>
                   <a:srgbClr val="333333"/>
                 </a:solidFill>

--- a/slides/release/04-advanced-techniques.pptx
+++ b/slides/release/04-advanced-techniques.pptx
@@ -2506,7 +2506,7 @@
         </p:nvSpPr>
         <p:spPr>
           <a:xfrm>
-            <a:off x="495300" y="5672931"/>
+            <a:off x="689800" y="6656849"/>
             <a:ext cx="7507224" cy="877824"/>
           </a:xfrm>
           <a:prstGeom prst="rect">
@@ -2667,7 +2667,7 @@
         </p:nvSpPr>
         <p:spPr>
           <a:xfrm>
-            <a:off x="495300" y="4682331"/>
+            <a:off x="571500" y="6425063"/>
             <a:ext cx="7507224" cy="877824"/>
           </a:xfrm>
           <a:prstGeom prst="rect">
@@ -2894,7 +2894,7 @@
         </p:nvSpPr>
         <p:spPr>
           <a:xfrm>
-            <a:off x="704088" y="6282531"/>
+            <a:off x="704088" y="6358731"/>
             <a:ext cx="7507224" cy="1316736"/>
           </a:xfrm>
           <a:prstGeom prst="rect">
@@ -3100,7 +3100,7 @@
         </p:nvSpPr>
         <p:spPr>
           <a:xfrm>
-            <a:off x="622363" y="6430695"/>
+            <a:off x="495300" y="6627481"/>
             <a:ext cx="7507224" cy="877824"/>
           </a:xfrm>
           <a:prstGeom prst="rect">
@@ -3425,19 +3425,18 @@
             <a:endParaRPr dirty="0"/>
           </a:p>
           <a:p>
+            <a:endParaRPr lang="en-US" dirty="0"/>
+          </a:p>
+          <a:p>
+            <a:endParaRPr lang="en-US" dirty="0"/>
+          </a:p>
+          <a:p>
             <a:endParaRPr dirty="0"/>
           </a:p>
           <a:p>
             <a:r>
               <a:rPr dirty="0"/>
-              <a:t> </a:t>
-            </a:r>
-            <a:endParaRPr lang="en-US" dirty="0"/>
-          </a:p>
-          <a:p>
-            <a:r>
-              <a:rPr dirty="0"/>
-              <a:t>Same conversation, four turns. You inspect each handoff.</a:t>
+              <a:t> Same conversation, four turns. You inspect each handoff.</a:t>
             </a:r>
           </a:p>
           <a:p>
@@ -3494,7 +3493,7 @@
         </p:blipFill>
         <p:spPr>
           <a:xfrm>
-            <a:off x="222250" y="1253331"/>
+            <a:off x="222250" y="1177131"/>
             <a:ext cx="8915400" cy="1844013"/>
           </a:xfrm>
           <a:prstGeom prst="rect">
@@ -3510,7 +3509,7 @@
         </p:nvSpPr>
         <p:spPr>
           <a:xfrm>
-            <a:off x="419100" y="5915493"/>
+            <a:off x="704088" y="5444331"/>
             <a:ext cx="7507224" cy="877824"/>
           </a:xfrm>
           <a:prstGeom prst="rect">
@@ -3710,8 +3709,8 @@
         </p:blipFill>
         <p:spPr>
           <a:xfrm>
-            <a:off x="0" y="4412771"/>
-            <a:ext cx="8915400" cy="491775"/>
+            <a:off x="0" y="4606131"/>
+            <a:ext cx="9372600" cy="533399"/>
           </a:xfrm>
           <a:prstGeom prst="rect">
             <a:avLst/>
@@ -3726,7 +3725,7 @@
         </p:nvSpPr>
         <p:spPr>
           <a:xfrm>
-            <a:off x="495300" y="6392519"/>
+            <a:off x="680275" y="6863975"/>
             <a:ext cx="7507224" cy="877824"/>
           </a:xfrm>
           <a:prstGeom prst="rect">
@@ -3761,7 +3760,7 @@
           <a:p>
             <a:pPr algn="ctr"/>
             <a:r>
-              <a:rPr sz="1800" i="1">
+              <a:rPr sz="1800" i="1" dirty="0">
                 <a:solidFill>
                   <a:srgbClr val="333333"/>
                 </a:solidFill>
@@ -3912,7 +3911,7 @@
         </p:nvSpPr>
         <p:spPr>
           <a:xfrm>
-            <a:off x="342900" y="5672931"/>
+            <a:off x="419100" y="6739731"/>
             <a:ext cx="7507224" cy="877824"/>
           </a:xfrm>
           <a:prstGeom prst="rect">
@@ -3947,7 +3946,7 @@
           <a:p>
             <a:pPr algn="ctr"/>
             <a:r>
-              <a:rPr sz="1800" i="1">
+              <a:rPr sz="1800" i="1" dirty="0">
                 <a:solidFill>
                   <a:srgbClr val="333333"/>
                 </a:solidFill>
@@ -4087,7 +4086,7 @@
         </p:nvSpPr>
         <p:spPr>
           <a:xfrm>
-            <a:off x="495300" y="4987131"/>
+            <a:off x="495300" y="6425063"/>
             <a:ext cx="7507224" cy="877824"/>
           </a:xfrm>
           <a:prstGeom prst="rect">
